--- a/docs/pitch.pptx
+++ b/docs/pitch.pptx
@@ -507,7 +507,7 @@
           <a:p>
             <a:r>
               <a:rPr lang="en-US" dirty="0"/>
-              <a:t>Open here. Three steps, and the word that matters is agentic — it acts, so the question is what it is ABLE to do. Every step is BOTH: the model proposes, code disposes. Do not claim any step is pure Python — step 1 is a model call.</a:t>
+              <a:t>Open with the three annoyances — it is personal and it disarms. Then the three steps. The pivot sentence is the last one: the order that makes the customer experience good is the same order that makes it safe.</a:t>
             </a:r>
             <a:endParaRPr lang="en-US" dirty="0"/>
           </a:p>
@@ -1395,7 +1395,7 @@
                 <a:ea typeface="Arial" pitchFamily="34" charset="-122"/>
                 <a:cs typeface="Arial" pitchFamily="34" charset="-120"/>
               </a:rPr>
-              <a:t>An agent does three things.</a:t>
+              <a:t>Find out what you need.</a:t>
             </a:r>
             <a:endParaRPr lang="en-US" sz="3300" dirty="0"/>
           </a:p>
@@ -1415,7 +1415,7 @@
                 <a:ea typeface="Arial" pitchFamily="34" charset="-122"/>
                 <a:cs typeface="Arial" pitchFamily="34" charset="-120"/>
               </a:rPr>
-              <a:t>Each one is where a guardrail belongs.</a:t>
+              <a:t>Find out who you are. Then serve you.</a:t>
             </a:r>
             <a:endParaRPr lang="en-US" sz="3300" dirty="0"/>
           </a:p>
@@ -1429,8 +1429,8 @@
         </p:nvSpPr>
         <p:spPr>
           <a:xfrm>
-            <a:off x="566928" y="2212848"/>
-            <a:ext cx="10607040" cy="960120"/>
+            <a:off x="566928" y="2286000"/>
+            <a:ext cx="10607040" cy="868680"/>
           </a:xfrm>
           <a:prstGeom prst="rect">
             <a:avLst/>
@@ -1457,7 +1457,7 @@
                 <a:ea typeface="Arial" pitchFamily="34" charset="-122"/>
                 <a:cs typeface="Arial" pitchFamily="34" charset="-120"/>
               </a:rPr>
-              <a:t>Find out what you need. Find out who you are. Serve you. That is the whole job — and it is agentic, which changes the stakes. A chatbot that says something wrong is embarrassing. An agent that DOES something wrong is an incident: it read another customer's order, approved a refund outside policy, promised a delivery date nobody can keep. So the question is never “will it say the right thing”. It is what is it able to do.</a:t>
+              <a:t>Three things annoy me about most support bots. They ask me to log in before they know what I want. They make me repeat things I already said. And when they cannot help, they keep trying instead of getting me a person. Bookly works in three steps, in that order, on purpose.</a:t>
             </a:r>
             <a:endParaRPr lang="en-US" sz="1350" dirty="0"/>
           </a:p>
@@ -1471,12 +1471,12 @@
         </p:nvSpPr>
         <p:spPr>
           <a:xfrm>
-            <a:off x="566928" y="3401568"/>
-            <a:ext cx="3602736" cy="1664208"/>
+            <a:off x="566928" y="3346704"/>
+            <a:ext cx="3602736" cy="1828800"/>
           </a:xfrm>
           <a:prstGeom prst="roundRect">
             <a:avLst>
-              <a:gd name="adj" fmla="val 3297"/>
+              <a:gd name="adj" fmla="val 3000"/>
             </a:avLst>
           </a:prstGeom>
           <a:solidFill>
@@ -1498,8 +1498,8 @@
         </p:nvSpPr>
         <p:spPr>
           <a:xfrm>
-            <a:off x="768096" y="3547872"/>
-            <a:ext cx="3200400" cy="237744"/>
+            <a:off x="768096" y="3483864"/>
+            <a:ext cx="3200400" cy="219456"/>
           </a:xfrm>
           <a:prstGeom prst="rect">
             <a:avLst/>
@@ -1515,7 +1515,7 @@
               <a:buNone/>
             </a:pPr>
             <a:r>
-              <a:rPr lang="en-US" sz="1250" b="1" dirty="0">
+              <a:rPr lang="en-US" sz="1200" b="1" dirty="0">
                 <a:solidFill>
                   <a:srgbClr val="FAF8F4"/>
                 </a:solidFill>
@@ -1525,24 +1525,89 @@
               </a:rPr>
               <a:t>1 · What you need</a:t>
             </a:r>
-            <a:endParaRPr lang="en-US" sz="1250" dirty="0"/>
-          </a:p>
-        </p:txBody>
-      </p:sp>
-      <p:sp>
-        <p:nvSpPr>
-          <p:cNvPr id="7" name="Shape 5"/>
-          <p:cNvSpPr/>
-          <p:nvPr/>
-        </p:nvSpPr>
-        <p:spPr>
-          <a:xfrm>
-            <a:off x="768096" y="3877056"/>
-            <a:ext cx="566928" cy="201168"/>
+            <a:endParaRPr lang="en-US" sz="1200" dirty="0"/>
+          </a:p>
+        </p:txBody>
+      </p:sp>
+      <p:sp>
+        <p:nvSpPr>
+          <p:cNvPr id="7" name="Text 5"/>
+          <p:cNvSpPr/>
+          <p:nvPr/>
+        </p:nvSpPr>
+        <p:spPr>
+          <a:xfrm>
+            <a:off x="768096" y="3758184"/>
+            <a:ext cx="3200400" cy="566928"/>
+          </a:xfrm>
+          <a:prstGeom prst="rect">
+            <a:avLst/>
+          </a:prstGeom>
+          <a:noFill/>
+          <a:ln/>
+        </p:spPr>
+        <p:txBody>
+          <a:bodyPr wrap="square" lIns="0" tIns="0" rIns="0" bIns="0" rtlCol="0" anchor="t"/>
+          <a:lstStyle/>
+          <a:p>
+            <a:pPr indent="0" marL="0">
+              <a:lnSpc>
+                <a:spcPts val="1250"/>
+              </a:lnSpc>
+              <a:buNone/>
+            </a:pPr>
+            <a:r>
+              <a:rPr lang="en-US" sz="950" dirty="0">
+                <a:solidFill>
+                  <a:srgbClr val="FAF8F4"/>
+                </a:solidFill>
+                <a:latin typeface="Arial" pitchFamily="34" charset="0"/>
+                <a:ea typeface="Arial" pitchFamily="34" charset="-122"/>
+                <a:cs typeface="Arial" pitchFamily="34" charset="-120"/>
+              </a:rPr>
+              <a:t>A policy question is answered straight away. No login, because the answer does not depend on who is asking.</a:t>
+            </a:r>
+            <a:endParaRPr lang="en-US" sz="950" dirty="0"/>
+          </a:p>
+        </p:txBody>
+      </p:sp>
+      <p:sp>
+        <p:nvSpPr>
+          <p:cNvPr id="8" name="Shape 6"/>
+          <p:cNvSpPr/>
+          <p:nvPr/>
+        </p:nvSpPr>
+        <p:spPr>
+          <a:xfrm>
+            <a:off x="768096" y="4370832"/>
+            <a:ext cx="3200400" cy="0"/>
+          </a:xfrm>
+          <a:prstGeom prst="line">
+            <a:avLst/>
+          </a:prstGeom>
+          <a:noFill/>
+          <a:ln w="9525">
+            <a:solidFill>
+              <a:srgbClr val="3D372F"/>
+            </a:solidFill>
+            <a:prstDash val="solid"/>
+          </a:ln>
+        </p:spPr>
+      </p:sp>
+      <p:sp>
+        <p:nvSpPr>
+          <p:cNvPr id="9" name="Shape 7"/>
+          <p:cNvSpPr/>
+          <p:nvPr/>
+        </p:nvSpPr>
+        <p:spPr>
+          <a:xfrm>
+            <a:off x="768096" y="4480560"/>
+            <a:ext cx="530352" cy="182880"/>
           </a:xfrm>
           <a:prstGeom prst="roundRect">
             <a:avLst>
-              <a:gd name="adj" fmla="val 22727"/>
+              <a:gd name="adj" fmla="val 25000"/>
             </a:avLst>
           </a:prstGeom>
           <a:solidFill>
@@ -1558,14 +1623,14 @@
       </p:sp>
       <p:sp>
         <p:nvSpPr>
-          <p:cNvPr id="8" name="Text 6"/>
-          <p:cNvSpPr/>
-          <p:nvPr/>
-        </p:nvSpPr>
-        <p:spPr>
-          <a:xfrm>
-            <a:off x="768096" y="3877056"/>
-            <a:ext cx="566928" cy="201168"/>
+          <p:cNvPr id="10" name="Text 8"/>
+          <p:cNvSpPr/>
+          <p:nvPr/>
+        </p:nvSpPr>
+        <p:spPr>
+          <a:xfrm>
+            <a:off x="768096" y="4480560"/>
+            <a:ext cx="530352" cy="182880"/>
           </a:xfrm>
           <a:prstGeom prst="rect">
             <a:avLst/>
@@ -1581,7 +1646,7 @@
               <a:buNone/>
             </a:pPr>
             <a:r>
-              <a:rPr lang="en-US" sz="650" b="1" spc="60" kern="0" dirty="0">
+              <a:rPr lang="en-US" sz="600" b="1" spc="50" kern="0" dirty="0">
                 <a:solidFill>
                   <a:srgbClr val="D98D63"/>
                 </a:solidFill>
@@ -1591,20 +1656,20 @@
               </a:rPr>
               <a:t>MODEL</a:t>
             </a:r>
-            <a:endParaRPr lang="en-US" sz="650" dirty="0"/>
-          </a:p>
-        </p:txBody>
-      </p:sp>
-      <p:sp>
-        <p:nvSpPr>
-          <p:cNvPr id="9" name="Text 7"/>
-          <p:cNvSpPr/>
-          <p:nvPr/>
-        </p:nvSpPr>
-        <p:spPr>
-          <a:xfrm>
-            <a:off x="1408176" y="3840480"/>
-            <a:ext cx="2560320" cy="512064"/>
+            <a:endParaRPr lang="en-US" sz="600" dirty="0"/>
+          </a:p>
+        </p:txBody>
+      </p:sp>
+      <p:sp>
+        <p:nvSpPr>
+          <p:cNvPr id="11" name="Text 9"/>
+          <p:cNvSpPr/>
+          <p:nvPr/>
+        </p:nvSpPr>
+        <p:spPr>
+          <a:xfrm>
+            <a:off x="1371600" y="4443984"/>
+            <a:ext cx="2596896" cy="292608"/>
           </a:xfrm>
           <a:prstGeom prst="rect">
             <a:avLst/>
@@ -1618,12 +1683,12 @@
           <a:p>
             <a:pPr indent="0" marL="0">
               <a:lnSpc>
-                <a:spcPts val="1250"/>
-              </a:lnSpc>
-              <a:buNone/>
-            </a:pPr>
-            <a:r>
-              <a:rPr lang="en-US" sz="950" dirty="0">
+                <a:spcPts val="1100"/>
+              </a:lnSpc>
+              <a:buNone/>
+            </a:pPr>
+            <a:r>
+              <a:rPr lang="en-US" sz="850" dirty="0">
                 <a:solidFill>
                   <a:srgbClr val="A79F93"/>
                 </a:solidFill>
@@ -1631,26 +1696,26 @@
                 <a:ea typeface="Arial" pitchFamily="34" charset="-122"/>
                 <a:cs typeface="Arial" pitchFamily="34" charset="-120"/>
               </a:rPr>
-              <a:t>Reads a messy sentence and proposes an intent — a constrained classification call.</a:t>
-            </a:r>
-            <a:endParaRPr lang="en-US" sz="950" dirty="0"/>
-          </a:p>
-        </p:txBody>
-      </p:sp>
-      <p:sp>
-        <p:nvSpPr>
-          <p:cNvPr id="10" name="Shape 8"/>
-          <p:cNvSpPr/>
-          <p:nvPr/>
-        </p:nvSpPr>
-        <p:spPr>
-          <a:xfrm>
-            <a:off x="768096" y="4443984"/>
-            <a:ext cx="566928" cy="201168"/>
+              <a:t>Proposes the intent.</a:t>
+            </a:r>
+            <a:endParaRPr lang="en-US" sz="850" dirty="0"/>
+          </a:p>
+        </p:txBody>
+      </p:sp>
+      <p:sp>
+        <p:nvSpPr>
+          <p:cNvPr id="12" name="Shape 10"/>
+          <p:cNvSpPr/>
+          <p:nvPr/>
+        </p:nvSpPr>
+        <p:spPr>
+          <a:xfrm>
+            <a:off x="768096" y="4809744"/>
+            <a:ext cx="530352" cy="182880"/>
           </a:xfrm>
           <a:prstGeom prst="roundRect">
             <a:avLst>
-              <a:gd name="adj" fmla="val 22727"/>
+              <a:gd name="adj" fmla="val 25000"/>
             </a:avLst>
           </a:prstGeom>
           <a:solidFill>
@@ -1666,14 +1731,14 @@
       </p:sp>
       <p:sp>
         <p:nvSpPr>
-          <p:cNvPr id="11" name="Text 9"/>
-          <p:cNvSpPr/>
-          <p:nvPr/>
-        </p:nvSpPr>
-        <p:spPr>
-          <a:xfrm>
-            <a:off x="768096" y="4443984"/>
-            <a:ext cx="566928" cy="201168"/>
+          <p:cNvPr id="13" name="Text 11"/>
+          <p:cNvSpPr/>
+          <p:nvPr/>
+        </p:nvSpPr>
+        <p:spPr>
+          <a:xfrm>
+            <a:off x="768096" y="4809744"/>
+            <a:ext cx="530352" cy="182880"/>
           </a:xfrm>
           <a:prstGeom prst="rect">
             <a:avLst/>
@@ -1689,7 +1754,7 @@
               <a:buNone/>
             </a:pPr>
             <a:r>
-              <a:rPr lang="en-US" sz="650" b="1" spc="60" kern="0" dirty="0">
+              <a:rPr lang="en-US" sz="600" b="1" spc="50" kern="0" dirty="0">
                 <a:solidFill>
                   <a:srgbClr val="63B98C"/>
                 </a:solidFill>
@@ -1699,20 +1764,20 @@
               </a:rPr>
               <a:t>CODE</a:t>
             </a:r>
-            <a:endParaRPr lang="en-US" sz="650" dirty="0"/>
-          </a:p>
-        </p:txBody>
-      </p:sp>
-      <p:sp>
-        <p:nvSpPr>
-          <p:cNvPr id="12" name="Text 10"/>
-          <p:cNvSpPr/>
-          <p:nvPr/>
-        </p:nvSpPr>
-        <p:spPr>
-          <a:xfrm>
-            <a:off x="1408176" y="4407408"/>
-            <a:ext cx="2560320" cy="512064"/>
+            <a:endParaRPr lang="en-US" sz="600" dirty="0"/>
+          </a:p>
+        </p:txBody>
+      </p:sp>
+      <p:sp>
+        <p:nvSpPr>
+          <p:cNvPr id="14" name="Text 12"/>
+          <p:cNvSpPr/>
+          <p:nvPr/>
+        </p:nvSpPr>
+        <p:spPr>
+          <a:xfrm>
+            <a:off x="1371600" y="4773168"/>
+            <a:ext cx="2596896" cy="292608"/>
           </a:xfrm>
           <a:prstGeom prst="rect">
             <a:avLst/>
@@ -1726,12 +1791,12 @@
           <a:p>
             <a:pPr indent="0" marL="0">
               <a:lnSpc>
-                <a:spcPts val="1250"/>
-              </a:lnSpc>
-              <a:buNone/>
-            </a:pPr>
-            <a:r>
-              <a:rPr lang="en-US" sz="950" dirty="0">
+                <a:spcPts val="1100"/>
+              </a:lnSpc>
+              <a:buNone/>
+            </a:pPr>
+            <a:r>
+              <a:rPr lang="en-US" sz="850" dirty="0">
                 <a:solidFill>
                   <a:srgbClr val="A79F93"/>
                 </a:solidFill>
@@ -1739,26 +1804,26 @@
                 <a:ea typeface="Arial" pitchFamily="34" charset="-122"/>
                 <a:cs typeface="Arial" pitchFamily="34" charset="-120"/>
               </a:rPr>
-              <a:t>Owns the confidence floor, the routing table, and the keyword fallback if it fails.</a:t>
-            </a:r>
-            <a:endParaRPr lang="en-US" sz="950" dirty="0"/>
-          </a:p>
-        </p:txBody>
-      </p:sp>
-      <p:sp>
-        <p:nvSpPr>
-          <p:cNvPr id="13" name="Shape 11"/>
-          <p:cNvSpPr/>
-          <p:nvPr/>
-        </p:nvSpPr>
-        <p:spPr>
-          <a:xfrm>
-            <a:off x="4343400" y="3401568"/>
-            <a:ext cx="3602736" cy="1664208"/>
+              <a:t>Owns the confidence floor and the routing table.</a:t>
+            </a:r>
+            <a:endParaRPr lang="en-US" sz="850" dirty="0"/>
+          </a:p>
+        </p:txBody>
+      </p:sp>
+      <p:sp>
+        <p:nvSpPr>
+          <p:cNvPr id="15" name="Shape 13"/>
+          <p:cNvSpPr/>
+          <p:nvPr/>
+        </p:nvSpPr>
+        <p:spPr>
+          <a:xfrm>
+            <a:off x="4343400" y="3346704"/>
+            <a:ext cx="3602736" cy="1828800"/>
           </a:xfrm>
           <a:prstGeom prst="roundRect">
             <a:avLst>
-              <a:gd name="adj" fmla="val 3297"/>
+              <a:gd name="adj" fmla="val 3000"/>
             </a:avLst>
           </a:prstGeom>
           <a:solidFill>
@@ -1774,14 +1839,14 @@
       </p:sp>
       <p:sp>
         <p:nvSpPr>
-          <p:cNvPr id="14" name="Text 12"/>
-          <p:cNvSpPr/>
-          <p:nvPr/>
-        </p:nvSpPr>
-        <p:spPr>
-          <a:xfrm>
-            <a:off x="4544568" y="3547872"/>
-            <a:ext cx="3200400" cy="237744"/>
+          <p:cNvPr id="16" name="Text 14"/>
+          <p:cNvSpPr/>
+          <p:nvPr/>
+        </p:nvSpPr>
+        <p:spPr>
+          <a:xfrm>
+            <a:off x="4544568" y="3483864"/>
+            <a:ext cx="3200400" cy="219456"/>
           </a:xfrm>
           <a:prstGeom prst="rect">
             <a:avLst/>
@@ -1797,7 +1862,7 @@
               <a:buNone/>
             </a:pPr>
             <a:r>
-              <a:rPr lang="en-US" sz="1250" b="1" dirty="0">
+              <a:rPr lang="en-US" sz="1200" b="1" dirty="0">
                 <a:solidFill>
                   <a:srgbClr val="FAF8F4"/>
                 </a:solidFill>
@@ -1807,24 +1872,89 @@
               </a:rPr>
               <a:t>2 · Who you are</a:t>
             </a:r>
-            <a:endParaRPr lang="en-US" sz="1250" dirty="0"/>
-          </a:p>
-        </p:txBody>
-      </p:sp>
-      <p:sp>
-        <p:nvSpPr>
-          <p:cNvPr id="15" name="Shape 13"/>
-          <p:cNvSpPr/>
-          <p:nvPr/>
-        </p:nvSpPr>
-        <p:spPr>
-          <a:xfrm>
-            <a:off x="4544568" y="3877056"/>
-            <a:ext cx="566928" cy="201168"/>
+            <a:endParaRPr lang="en-US" sz="1200" dirty="0"/>
+          </a:p>
+        </p:txBody>
+      </p:sp>
+      <p:sp>
+        <p:nvSpPr>
+          <p:cNvPr id="17" name="Text 15"/>
+          <p:cNvSpPr/>
+          <p:nvPr/>
+        </p:nvSpPr>
+        <p:spPr>
+          <a:xfrm>
+            <a:off x="4544568" y="3758184"/>
+            <a:ext cx="3200400" cy="566928"/>
+          </a:xfrm>
+          <a:prstGeom prst="rect">
+            <a:avLst/>
+          </a:prstGeom>
+          <a:noFill/>
+          <a:ln/>
+        </p:spPr>
+        <p:txBody>
+          <a:bodyPr wrap="square" lIns="0" tIns="0" rIns="0" bIns="0" rtlCol="0" anchor="t"/>
+          <a:lstStyle/>
+          <a:p>
+            <a:pPr indent="0" marL="0">
+              <a:lnSpc>
+                <a:spcPts val="1250"/>
+              </a:lnSpc>
+              <a:buNone/>
+            </a:pPr>
+            <a:r>
+              <a:rPr lang="en-US" sz="950" dirty="0">
+                <a:solidFill>
+                  <a:srgbClr val="FAF8F4"/>
+                </a:solidFill>
+                <a:latin typeface="Arial" pitchFamily="34" charset="0"/>
+                <a:ea typeface="Arial" pitchFamily="34" charset="-122"/>
+                <a:cs typeface="Arial" pitchFamily="34" charset="-120"/>
+              </a:rPr>
+              <a:t>Email and ZIP once. Give all of it in one sentence and you are not asked for any of it again.</a:t>
+            </a:r>
+            <a:endParaRPr lang="en-US" sz="950" dirty="0"/>
+          </a:p>
+        </p:txBody>
+      </p:sp>
+      <p:sp>
+        <p:nvSpPr>
+          <p:cNvPr id="18" name="Shape 16"/>
+          <p:cNvSpPr/>
+          <p:nvPr/>
+        </p:nvSpPr>
+        <p:spPr>
+          <a:xfrm>
+            <a:off x="4544568" y="4370832"/>
+            <a:ext cx="3200400" cy="0"/>
+          </a:xfrm>
+          <a:prstGeom prst="line">
+            <a:avLst/>
+          </a:prstGeom>
+          <a:noFill/>
+          <a:ln w="9525">
+            <a:solidFill>
+              <a:srgbClr val="3D372F"/>
+            </a:solidFill>
+            <a:prstDash val="solid"/>
+          </a:ln>
+        </p:spPr>
+      </p:sp>
+      <p:sp>
+        <p:nvSpPr>
+          <p:cNvPr id="19" name="Shape 17"/>
+          <p:cNvSpPr/>
+          <p:nvPr/>
+        </p:nvSpPr>
+        <p:spPr>
+          <a:xfrm>
+            <a:off x="4544568" y="4480560"/>
+            <a:ext cx="530352" cy="182880"/>
           </a:xfrm>
           <a:prstGeom prst="roundRect">
             <a:avLst>
-              <a:gd name="adj" fmla="val 22727"/>
+              <a:gd name="adj" fmla="val 25000"/>
             </a:avLst>
           </a:prstGeom>
           <a:solidFill>
@@ -1840,14 +1970,14 @@
       </p:sp>
       <p:sp>
         <p:nvSpPr>
-          <p:cNvPr id="16" name="Text 14"/>
-          <p:cNvSpPr/>
-          <p:nvPr/>
-        </p:nvSpPr>
-        <p:spPr>
-          <a:xfrm>
-            <a:off x="4544568" y="3877056"/>
-            <a:ext cx="566928" cy="201168"/>
+          <p:cNvPr id="20" name="Text 18"/>
+          <p:cNvSpPr/>
+          <p:nvPr/>
+        </p:nvSpPr>
+        <p:spPr>
+          <a:xfrm>
+            <a:off x="4544568" y="4480560"/>
+            <a:ext cx="530352" cy="182880"/>
           </a:xfrm>
           <a:prstGeom prst="rect">
             <a:avLst/>
@@ -1863,7 +1993,7 @@
               <a:buNone/>
             </a:pPr>
             <a:r>
-              <a:rPr lang="en-US" sz="650" b="1" spc="60" kern="0" dirty="0">
+              <a:rPr lang="en-US" sz="600" b="1" spc="50" kern="0" dirty="0">
                 <a:solidFill>
                   <a:srgbClr val="D98D63"/>
                 </a:solidFill>
@@ -1873,20 +2003,20 @@
               </a:rPr>
               <a:t>MODEL</a:t>
             </a:r>
-            <a:endParaRPr lang="en-US" sz="650" dirty="0"/>
-          </a:p>
-        </p:txBody>
-      </p:sp>
-      <p:sp>
-        <p:nvSpPr>
-          <p:cNvPr id="17" name="Text 15"/>
-          <p:cNvSpPr/>
-          <p:nvPr/>
-        </p:nvSpPr>
-        <p:spPr>
-          <a:xfrm>
-            <a:off x="5184648" y="3840480"/>
-            <a:ext cx="2560320" cy="512064"/>
+            <a:endParaRPr lang="en-US" sz="600" dirty="0"/>
+          </a:p>
+        </p:txBody>
+      </p:sp>
+      <p:sp>
+        <p:nvSpPr>
+          <p:cNvPr id="21" name="Text 19"/>
+          <p:cNvSpPr/>
+          <p:nvPr/>
+        </p:nvSpPr>
+        <p:spPr>
+          <a:xfrm>
+            <a:off x="5148072" y="4443984"/>
+            <a:ext cx="2596896" cy="292608"/>
           </a:xfrm>
           <a:prstGeom prst="rect">
             <a:avLst/>
@@ -1900,12 +2030,12 @@
           <a:p>
             <a:pPr indent="0" marL="0">
               <a:lnSpc>
-                <a:spcPts val="1250"/>
-              </a:lnSpc>
-              <a:buNone/>
-            </a:pPr>
-            <a:r>
-              <a:rPr lang="en-US" sz="950" dirty="0">
+                <a:spcPts val="1100"/>
+              </a:lnSpc>
+              <a:buNone/>
+            </a:pPr>
+            <a:r>
+              <a:rPr lang="en-US" sz="850" dirty="0">
                 <a:solidFill>
                   <a:srgbClr val="A79F93"/>
                 </a:solidFill>
@@ -1913,26 +2043,26 @@
                 <a:ea typeface="Arial" pitchFamily="34" charset="-122"/>
                 <a:cs typeface="Arial" pitchFamily="34" charset="-120"/>
               </a:rPr>
-              <a:t>Collects the two factors from the conversation and submits them.</a:t>
-            </a:r>
-            <a:endParaRPr lang="en-US" sz="950" dirty="0"/>
-          </a:p>
-        </p:txBody>
-      </p:sp>
-      <p:sp>
-        <p:nvSpPr>
-          <p:cNvPr id="18" name="Shape 16"/>
-          <p:cNvSpPr/>
-          <p:nvPr/>
-        </p:nvSpPr>
-        <p:spPr>
-          <a:xfrm>
-            <a:off x="4544568" y="4443984"/>
-            <a:ext cx="566928" cy="201168"/>
+              <a:t>Collects the two factors.</a:t>
+            </a:r>
+            <a:endParaRPr lang="en-US" sz="850" dirty="0"/>
+          </a:p>
+        </p:txBody>
+      </p:sp>
+      <p:sp>
+        <p:nvSpPr>
+          <p:cNvPr id="22" name="Shape 20"/>
+          <p:cNvSpPr/>
+          <p:nvPr/>
+        </p:nvSpPr>
+        <p:spPr>
+          <a:xfrm>
+            <a:off x="4544568" y="4809744"/>
+            <a:ext cx="530352" cy="182880"/>
           </a:xfrm>
           <a:prstGeom prst="roundRect">
             <a:avLst>
-              <a:gd name="adj" fmla="val 22727"/>
+              <a:gd name="adj" fmla="val 25000"/>
             </a:avLst>
           </a:prstGeom>
           <a:solidFill>
@@ -1948,14 +2078,14 @@
       </p:sp>
       <p:sp>
         <p:nvSpPr>
-          <p:cNvPr id="19" name="Text 17"/>
-          <p:cNvSpPr/>
-          <p:nvPr/>
-        </p:nvSpPr>
-        <p:spPr>
-          <a:xfrm>
-            <a:off x="4544568" y="4443984"/>
-            <a:ext cx="566928" cy="201168"/>
+          <p:cNvPr id="23" name="Text 21"/>
+          <p:cNvSpPr/>
+          <p:nvPr/>
+        </p:nvSpPr>
+        <p:spPr>
+          <a:xfrm>
+            <a:off x="4544568" y="4809744"/>
+            <a:ext cx="530352" cy="182880"/>
           </a:xfrm>
           <a:prstGeom prst="rect">
             <a:avLst/>
@@ -1971,7 +2101,7 @@
               <a:buNone/>
             </a:pPr>
             <a:r>
-              <a:rPr lang="en-US" sz="650" b="1" spc="60" kern="0" dirty="0">
+              <a:rPr lang="en-US" sz="600" b="1" spc="50" kern="0" dirty="0">
                 <a:solidFill>
                   <a:srgbClr val="63B98C"/>
                 </a:solidFill>
@@ -1981,20 +2111,20 @@
               </a:rPr>
               <a:t>CODE</a:t>
             </a:r>
-            <a:endParaRPr lang="en-US" sz="650" dirty="0"/>
-          </a:p>
-        </p:txBody>
-      </p:sp>
-      <p:sp>
-        <p:nvSpPr>
-          <p:cNvPr id="20" name="Text 18"/>
-          <p:cNvSpPr/>
-          <p:nvPr/>
-        </p:nvSpPr>
-        <p:spPr>
-          <a:xfrm>
-            <a:off x="5184648" y="4407408"/>
-            <a:ext cx="2560320" cy="512064"/>
+            <a:endParaRPr lang="en-US" sz="600" dirty="0"/>
+          </a:p>
+        </p:txBody>
+      </p:sp>
+      <p:sp>
+        <p:nvSpPr>
+          <p:cNvPr id="24" name="Text 22"/>
+          <p:cNvSpPr/>
+          <p:nvPr/>
+        </p:nvSpPr>
+        <p:spPr>
+          <a:xfrm>
+            <a:off x="5148072" y="4773168"/>
+            <a:ext cx="2596896" cy="292608"/>
           </a:xfrm>
           <a:prstGeom prst="rect">
             <a:avLst/>
@@ -2008,12 +2138,12 @@
           <a:p>
             <a:pPr indent="0" marL="0">
               <a:lnSpc>
-                <a:spcPts val="1250"/>
-              </a:lnSpc>
-              <a:buNone/>
-            </a:pPr>
-            <a:r>
-              <a:rPr lang="en-US" sz="950" dirty="0">
+                <a:spcPts val="1100"/>
+              </a:lnSpc>
+              <a:buNone/>
+            </a:pPr>
+            <a:r>
+              <a:rPr lang="en-US" sz="850" dirty="0">
                 <a:solidFill>
                   <a:srgbClr val="A79F93"/>
                 </a:solidFill>
@@ -2021,26 +2151,26 @@
                 <a:ea typeface="Arial" pitchFamily="34" charset="-122"/>
                 <a:cs typeface="Arial" pitchFamily="34" charset="-120"/>
               </a:rPr>
-              <a:t>Compares them, mints the scoped token, locks out after three tries.</a:t>
-            </a:r>
-            <a:endParaRPr lang="en-US" sz="950" dirty="0"/>
-          </a:p>
-        </p:txBody>
-      </p:sp>
-      <p:sp>
-        <p:nvSpPr>
-          <p:cNvPr id="21" name="Shape 19"/>
-          <p:cNvSpPr/>
-          <p:nvPr/>
-        </p:nvSpPr>
-        <p:spPr>
-          <a:xfrm>
-            <a:off x="8119872" y="3401568"/>
-            <a:ext cx="3602736" cy="1664208"/>
+              <a:t>Compares them and mints a scoped token.</a:t>
+            </a:r>
+            <a:endParaRPr lang="en-US" sz="850" dirty="0"/>
+          </a:p>
+        </p:txBody>
+      </p:sp>
+      <p:sp>
+        <p:nvSpPr>
+          <p:cNvPr id="25" name="Shape 23"/>
+          <p:cNvSpPr/>
+          <p:nvPr/>
+        </p:nvSpPr>
+        <p:spPr>
+          <a:xfrm>
+            <a:off x="8119872" y="3346704"/>
+            <a:ext cx="3602736" cy="1828800"/>
           </a:xfrm>
           <a:prstGeom prst="roundRect">
             <a:avLst>
-              <a:gd name="adj" fmla="val 3297"/>
+              <a:gd name="adj" fmla="val 3000"/>
             </a:avLst>
           </a:prstGeom>
           <a:solidFill>
@@ -2056,14 +2186,14 @@
       </p:sp>
       <p:sp>
         <p:nvSpPr>
-          <p:cNvPr id="22" name="Text 20"/>
-          <p:cNvSpPr/>
-          <p:nvPr/>
-        </p:nvSpPr>
-        <p:spPr>
-          <a:xfrm>
-            <a:off x="8321040" y="3547872"/>
-            <a:ext cx="3200400" cy="237744"/>
+          <p:cNvPr id="26" name="Text 24"/>
+          <p:cNvSpPr/>
+          <p:nvPr/>
+        </p:nvSpPr>
+        <p:spPr>
+          <a:xfrm>
+            <a:off x="8321040" y="3483864"/>
+            <a:ext cx="3200400" cy="219456"/>
           </a:xfrm>
           <a:prstGeom prst="rect">
             <a:avLst/>
@@ -2079,7 +2209,7 @@
               <a:buNone/>
             </a:pPr>
             <a:r>
-              <a:rPr lang="en-US" sz="1250" b="1" dirty="0">
+              <a:rPr lang="en-US" sz="1200" b="1" dirty="0">
                 <a:solidFill>
                   <a:srgbClr val="FAF8F4"/>
                 </a:solidFill>
@@ -2089,24 +2219,89 @@
               </a:rPr>
               <a:t>3 · Serve you</a:t>
             </a:r>
-            <a:endParaRPr lang="en-US" sz="1250" dirty="0"/>
-          </a:p>
-        </p:txBody>
-      </p:sp>
-      <p:sp>
-        <p:nvSpPr>
-          <p:cNvPr id="23" name="Shape 21"/>
-          <p:cNvSpPr/>
-          <p:nvPr/>
-        </p:nvSpPr>
-        <p:spPr>
-          <a:xfrm>
-            <a:off x="8321040" y="3877056"/>
-            <a:ext cx="566928" cy="201168"/>
+            <a:endParaRPr lang="en-US" sz="1200" dirty="0"/>
+          </a:p>
+        </p:txBody>
+      </p:sp>
+      <p:sp>
+        <p:nvSpPr>
+          <p:cNvPr id="27" name="Text 25"/>
+          <p:cNvSpPr/>
+          <p:nvPr/>
+        </p:nvSpPr>
+        <p:spPr>
+          <a:xfrm>
+            <a:off x="8321040" y="3758184"/>
+            <a:ext cx="3200400" cy="566928"/>
+          </a:xfrm>
+          <a:prstGeom prst="rect">
+            <a:avLst/>
+          </a:prstGeom>
+          <a:noFill/>
+          <a:ln/>
+        </p:spPr>
+        <p:txBody>
+          <a:bodyPr wrap="square" lIns="0" tIns="0" rIns="0" bIns="0" rtlCol="0" anchor="t"/>
+          <a:lstStyle/>
+          <a:p>
+            <a:pPr indent="0" marL="0">
+              <a:lnSpc>
+                <a:spcPts val="1250"/>
+              </a:lnSpc>
+              <a:buNone/>
+            </a:pPr>
+            <a:r>
+              <a:rPr lang="en-US" sz="950" dirty="0">
+                <a:solidFill>
+                  <a:srgbClr val="FAF8F4"/>
+                </a:solidFill>
+                <a:latin typeface="Arial" pitchFamily="34" charset="0"/>
+                <a:ea typeface="Arial" pitchFamily="34" charset="-122"/>
+                <a:cs typeface="Arial" pitchFamily="34" charset="-120"/>
+              </a:rPr>
+              <a:t>Two open orders? It asks which one. Outside the return window? A clear no, with the arithmetic. It does not stall.</a:t>
+            </a:r>
+            <a:endParaRPr lang="en-US" sz="950" dirty="0"/>
+          </a:p>
+        </p:txBody>
+      </p:sp>
+      <p:sp>
+        <p:nvSpPr>
+          <p:cNvPr id="28" name="Shape 26"/>
+          <p:cNvSpPr/>
+          <p:nvPr/>
+        </p:nvSpPr>
+        <p:spPr>
+          <a:xfrm>
+            <a:off x="8321040" y="4370832"/>
+            <a:ext cx="3200400" cy="0"/>
+          </a:xfrm>
+          <a:prstGeom prst="line">
+            <a:avLst/>
+          </a:prstGeom>
+          <a:noFill/>
+          <a:ln w="9525">
+            <a:solidFill>
+              <a:srgbClr val="3D372F"/>
+            </a:solidFill>
+            <a:prstDash val="solid"/>
+          </a:ln>
+        </p:spPr>
+      </p:sp>
+      <p:sp>
+        <p:nvSpPr>
+          <p:cNvPr id="29" name="Shape 27"/>
+          <p:cNvSpPr/>
+          <p:nvPr/>
+        </p:nvSpPr>
+        <p:spPr>
+          <a:xfrm>
+            <a:off x="8321040" y="4480560"/>
+            <a:ext cx="530352" cy="182880"/>
           </a:xfrm>
           <a:prstGeom prst="roundRect">
             <a:avLst>
-              <a:gd name="adj" fmla="val 22727"/>
+              <a:gd name="adj" fmla="val 25000"/>
             </a:avLst>
           </a:prstGeom>
           <a:solidFill>
@@ -2122,14 +2317,14 @@
       </p:sp>
       <p:sp>
         <p:nvSpPr>
-          <p:cNvPr id="24" name="Text 22"/>
-          <p:cNvSpPr/>
-          <p:nvPr/>
-        </p:nvSpPr>
-        <p:spPr>
-          <a:xfrm>
-            <a:off x="8321040" y="3877056"/>
-            <a:ext cx="566928" cy="201168"/>
+          <p:cNvPr id="30" name="Text 28"/>
+          <p:cNvSpPr/>
+          <p:nvPr/>
+        </p:nvSpPr>
+        <p:spPr>
+          <a:xfrm>
+            <a:off x="8321040" y="4480560"/>
+            <a:ext cx="530352" cy="182880"/>
           </a:xfrm>
           <a:prstGeom prst="rect">
             <a:avLst/>
@@ -2145,7 +2340,7 @@
               <a:buNone/>
             </a:pPr>
             <a:r>
-              <a:rPr lang="en-US" sz="650" b="1" spc="60" kern="0" dirty="0">
+              <a:rPr lang="en-US" sz="600" b="1" spc="50" kern="0" dirty="0">
                 <a:solidFill>
                   <a:srgbClr val="D98D63"/>
                 </a:solidFill>
@@ -2155,20 +2350,20 @@
               </a:rPr>
               <a:t>MODEL</a:t>
             </a:r>
-            <a:endParaRPr lang="en-US" sz="650" dirty="0"/>
-          </a:p>
-        </p:txBody>
-      </p:sp>
-      <p:sp>
-        <p:nvSpPr>
-          <p:cNvPr id="25" name="Text 23"/>
-          <p:cNvSpPr/>
-          <p:nvPr/>
-        </p:nvSpPr>
-        <p:spPr>
-          <a:xfrm>
-            <a:off x="8961120" y="3840480"/>
-            <a:ext cx="2560320" cy="512064"/>
+            <a:endParaRPr lang="en-US" sz="600" dirty="0"/>
+          </a:p>
+        </p:txBody>
+      </p:sp>
+      <p:sp>
+        <p:nvSpPr>
+          <p:cNvPr id="31" name="Text 29"/>
+          <p:cNvSpPr/>
+          <p:nvPr/>
+        </p:nvSpPr>
+        <p:spPr>
+          <a:xfrm>
+            <a:off x="8924544" y="4443984"/>
+            <a:ext cx="2596896" cy="292608"/>
           </a:xfrm>
           <a:prstGeom prst="rect">
             <a:avLst/>
@@ -2182,12 +2377,12 @@
           <a:p>
             <a:pPr indent="0" marL="0">
               <a:lnSpc>
-                <a:spcPts val="1250"/>
-              </a:lnSpc>
-              <a:buNone/>
-            </a:pPr>
-            <a:r>
-              <a:rPr lang="en-US" sz="950" dirty="0">
+                <a:spcPts val="1100"/>
+              </a:lnSpc>
+              <a:buNone/>
+            </a:pPr>
+            <a:r>
+              <a:rPr lang="en-US" sz="850" dirty="0">
                 <a:solidFill>
                   <a:srgbClr val="A79F93"/>
                 </a:solidFill>
@@ -2195,26 +2390,26 @@
                 <a:ea typeface="Arial" pitchFamily="34" charset="-122"/>
                 <a:cs typeface="Arial" pitchFamily="34" charset="-120"/>
               </a:rPr>
-              <a:t>Chooses a tool and writes what the customer reads.</a:t>
-            </a:r>
-            <a:endParaRPr lang="en-US" sz="950" dirty="0"/>
-          </a:p>
-        </p:txBody>
-      </p:sp>
-      <p:sp>
-        <p:nvSpPr>
-          <p:cNvPr id="26" name="Shape 24"/>
-          <p:cNvSpPr/>
-          <p:nvPr/>
-        </p:nvSpPr>
-        <p:spPr>
-          <a:xfrm>
-            <a:off x="8321040" y="4443984"/>
-            <a:ext cx="566928" cy="201168"/>
+              <a:t>Picks the tool and writes the reply.</a:t>
+            </a:r>
+            <a:endParaRPr lang="en-US" sz="850" dirty="0"/>
+          </a:p>
+        </p:txBody>
+      </p:sp>
+      <p:sp>
+        <p:nvSpPr>
+          <p:cNvPr id="32" name="Shape 30"/>
+          <p:cNvSpPr/>
+          <p:nvPr/>
+        </p:nvSpPr>
+        <p:spPr>
+          <a:xfrm>
+            <a:off x="8321040" y="4809744"/>
+            <a:ext cx="530352" cy="182880"/>
           </a:xfrm>
           <a:prstGeom prst="roundRect">
             <a:avLst>
-              <a:gd name="adj" fmla="val 22727"/>
+              <a:gd name="adj" fmla="val 25000"/>
             </a:avLst>
           </a:prstGeom>
           <a:solidFill>
@@ -2230,14 +2425,14 @@
       </p:sp>
       <p:sp>
         <p:nvSpPr>
-          <p:cNvPr id="27" name="Text 25"/>
-          <p:cNvSpPr/>
-          <p:nvPr/>
-        </p:nvSpPr>
-        <p:spPr>
-          <a:xfrm>
-            <a:off x="8321040" y="4443984"/>
-            <a:ext cx="566928" cy="201168"/>
+          <p:cNvPr id="33" name="Text 31"/>
+          <p:cNvSpPr/>
+          <p:nvPr/>
+        </p:nvSpPr>
+        <p:spPr>
+          <a:xfrm>
+            <a:off x="8321040" y="4809744"/>
+            <a:ext cx="530352" cy="182880"/>
           </a:xfrm>
           <a:prstGeom prst="rect">
             <a:avLst/>
@@ -2253,7 +2448,7 @@
               <a:buNone/>
             </a:pPr>
             <a:r>
-              <a:rPr lang="en-US" sz="650" b="1" spc="60" kern="0" dirty="0">
+              <a:rPr lang="en-US" sz="600" b="1" spc="50" kern="0" dirty="0">
                 <a:solidFill>
                   <a:srgbClr val="63B98C"/>
                 </a:solidFill>
@@ -2263,20 +2458,20 @@
               </a:rPr>
               <a:t>CODE</a:t>
             </a:r>
-            <a:endParaRPr lang="en-US" sz="650" dirty="0"/>
-          </a:p>
-        </p:txBody>
-      </p:sp>
-      <p:sp>
-        <p:nvSpPr>
-          <p:cNvPr id="28" name="Text 26"/>
-          <p:cNvSpPr/>
-          <p:nvPr/>
-        </p:nvSpPr>
-        <p:spPr>
-          <a:xfrm>
-            <a:off x="8961120" y="4407408"/>
-            <a:ext cx="2560320" cy="512064"/>
+            <a:endParaRPr lang="en-US" sz="600" dirty="0"/>
+          </a:p>
+        </p:txBody>
+      </p:sp>
+      <p:sp>
+        <p:nvSpPr>
+          <p:cNvPr id="34" name="Text 32"/>
+          <p:cNvSpPr/>
+          <p:nvPr/>
+        </p:nvSpPr>
+        <p:spPr>
+          <a:xfrm>
+            <a:off x="8924544" y="4773168"/>
+            <a:ext cx="2596896" cy="292608"/>
           </a:xfrm>
           <a:prstGeom prst="rect">
             <a:avLst/>
@@ -2290,12 +2485,12 @@
           <a:p>
             <a:pPr indent="0" marL="0">
               <a:lnSpc>
-                <a:spcPts val="1250"/>
-              </a:lnSpc>
-              <a:buNone/>
-            </a:pPr>
-            <a:r>
-              <a:rPr lang="en-US" sz="950" dirty="0">
+                <a:spcPts val="1100"/>
+              </a:lnSpc>
+              <a:buNone/>
+            </a:pPr>
+            <a:r>
+              <a:rPr lang="en-US" sz="850" dirty="0">
                 <a:solidFill>
                   <a:srgbClr val="A79F93"/>
                 </a:solidFill>
@@ -2303,21 +2498,21 @@
                 <a:ea typeface="Arial" pitchFamily="34" charset="-122"/>
                 <a:cs typeface="Arial" pitchFamily="34" charset="-120"/>
               </a:rPr>
-              <a:t>Decides which tools exist, re-validates policy, forces the handoff.</a:t>
-            </a:r>
-            <a:endParaRPr lang="en-US" sz="950" dirty="0"/>
-          </a:p>
-        </p:txBody>
-      </p:sp>
-      <p:sp>
-        <p:nvSpPr>
-          <p:cNvPr id="29" name="Text 27"/>
-          <p:cNvSpPr/>
-          <p:nvPr/>
-        </p:nvSpPr>
-        <p:spPr>
-          <a:xfrm>
-            <a:off x="566928" y="5248656"/>
+              <a:t>Decides which tools exist at all.</a:t>
+            </a:r>
+            <a:endParaRPr lang="en-US" sz="850" dirty="0"/>
+          </a:p>
+        </p:txBody>
+      </p:sp>
+      <p:sp>
+        <p:nvSpPr>
+          <p:cNvPr id="35" name="Text 33"/>
+          <p:cNvSpPr/>
+          <p:nvPr/>
+        </p:nvSpPr>
+        <p:spPr>
+          <a:xfrm>
+            <a:off x="566928" y="5358384"/>
             <a:ext cx="10881360" cy="731520"/>
           </a:xfrm>
           <a:prstGeom prst="rect">
@@ -2345,7 +2540,7 @@
                 <a:ea typeface="Arial" pitchFamily="34" charset="-122"/>
                 <a:cs typeface="Arial" pitchFamily="34" charset="-120"/>
               </a:rPr>
-              <a:t>Every step is probabilistic and deterministic. The model proposes; code disposes. </a:t>
+              <a:t>The same order is what makes it safe to ship. </a:t>
             </a:r>
             <a:pPr indent="0" marL="0">
               <a:lnSpc>
@@ -2362,7 +2557,7 @@
                 <a:ea typeface="Arial" pitchFamily="34" charset="-122"/>
                 <a:cs typeface="Arial" pitchFamily="34" charset="-120"/>
               </a:rPr>
-              <a:t>Nothing probabilistic is ever the last word.</a:t>
+              <a:t>A system prompt asking the model not to do something is not a control.</a:t>
             </a:r>
             <a:endParaRPr lang="en-US" sz="1550" dirty="0"/>
           </a:p>
@@ -4012,18 +4207,60 @@
       </p:sp>
       <p:sp>
         <p:nvSpPr>
-          <p:cNvPr id="4" name="Shape 2"/>
-          <p:cNvSpPr/>
-          <p:nvPr/>
-        </p:nvSpPr>
-        <p:spPr>
-          <a:xfrm>
-            <a:off x="566928" y="1700784"/>
-            <a:ext cx="3602736" cy="3054096"/>
+          <p:cNvPr id="4" name="Text 2"/>
+          <p:cNvSpPr/>
+          <p:nvPr/>
+        </p:nvSpPr>
+        <p:spPr>
+          <a:xfrm>
+            <a:off x="566928" y="1463040"/>
+            <a:ext cx="11064240" cy="457200"/>
+          </a:xfrm>
+          <a:prstGeom prst="rect">
+            <a:avLst/>
+          </a:prstGeom>
+          <a:noFill/>
+          <a:ln/>
+        </p:spPr>
+        <p:txBody>
+          <a:bodyPr wrap="square" lIns="0" tIns="0" rIns="0" bIns="0" rtlCol="0" anchor="t"/>
+          <a:lstStyle/>
+          <a:p>
+            <a:pPr indent="0" marL="0">
+              <a:lnSpc>
+                <a:spcPts val="1950"/>
+              </a:lnSpc>
+              <a:buNone/>
+            </a:pPr>
+            <a:r>
+              <a:rPr lang="en-US" sz="1350" dirty="0">
+                <a:solidFill>
+                  <a:srgbClr val="6F6A61"/>
+                </a:solidFill>
+                <a:latin typeface="Arial" pitchFamily="34" charset="0"/>
+                <a:ea typeface="Arial" pitchFamily="34" charset="-122"/>
+                <a:cs typeface="Arial" pitchFamily="34" charset="-120"/>
+              </a:rPr>
+              <a:t>Guardrails are not friction here. They are what lets me promise the things on the first slide and still hand the system to a security reviewer.</a:t>
+            </a:r>
+            <a:endParaRPr lang="en-US" sz="1350" dirty="0"/>
+          </a:p>
+        </p:txBody>
+      </p:sp>
+      <p:sp>
+        <p:nvSpPr>
+          <p:cNvPr id="5" name="Shape 3"/>
+          <p:cNvSpPr/>
+          <p:nvPr/>
+        </p:nvSpPr>
+        <p:spPr>
+          <a:xfrm>
+            <a:off x="566928" y="2011680"/>
+            <a:ext cx="3602736" cy="2834640"/>
           </a:xfrm>
           <a:prstGeom prst="roundRect">
             <a:avLst>
-              <a:gd name="adj" fmla="val 1796"/>
+              <a:gd name="adj" fmla="val 1935"/>
             </a:avLst>
           </a:prstGeom>
           <a:solidFill>
@@ -4039,13 +4276,13 @@
       </p:sp>
       <p:sp>
         <p:nvSpPr>
-          <p:cNvPr id="5" name="Text 3"/>
-          <p:cNvSpPr/>
-          <p:nvPr/>
-        </p:nvSpPr>
-        <p:spPr>
-          <a:xfrm>
-            <a:off x="786384" y="1883664"/>
+          <p:cNvPr id="6" name="Text 4"/>
+          <p:cNvSpPr/>
+          <p:nvPr/>
+        </p:nvSpPr>
+        <p:spPr>
+          <a:xfrm>
+            <a:off x="786384" y="2194560"/>
             <a:ext cx="3163824" cy="182880"/>
           </a:xfrm>
           <a:prstGeom prst="rect">
@@ -4078,14 +4315,14 @@
       </p:sp>
       <p:sp>
         <p:nvSpPr>
-          <p:cNvPr id="6" name="Text 4"/>
-          <p:cNvSpPr/>
-          <p:nvPr/>
-        </p:nvSpPr>
-        <p:spPr>
-          <a:xfrm>
-            <a:off x="786384" y="2176272"/>
-            <a:ext cx="3163824" cy="2377440"/>
+          <p:cNvPr id="7" name="Text 5"/>
+          <p:cNvSpPr/>
+          <p:nvPr/>
+        </p:nvSpPr>
+        <p:spPr>
+          <a:xfrm>
+            <a:off x="786384" y="2487168"/>
+            <a:ext cx="3163824" cy="2194560"/>
           </a:xfrm>
           <a:prstGeom prst="rect">
             <a:avLst/>
@@ -4196,18 +4433,18 @@
       </p:sp>
       <p:sp>
         <p:nvSpPr>
-          <p:cNvPr id="7" name="Shape 5"/>
-          <p:cNvSpPr/>
-          <p:nvPr/>
-        </p:nvSpPr>
-        <p:spPr>
-          <a:xfrm>
-            <a:off x="4343400" y="1700784"/>
-            <a:ext cx="3602736" cy="3054096"/>
+          <p:cNvPr id="8" name="Shape 6"/>
+          <p:cNvSpPr/>
+          <p:nvPr/>
+        </p:nvSpPr>
+        <p:spPr>
+          <a:xfrm>
+            <a:off x="4343400" y="2011680"/>
+            <a:ext cx="3602736" cy="2834640"/>
           </a:xfrm>
           <a:prstGeom prst="roundRect">
             <a:avLst>
-              <a:gd name="adj" fmla="val 1796"/>
+              <a:gd name="adj" fmla="val 1935"/>
             </a:avLst>
           </a:prstGeom>
           <a:solidFill>
@@ -4223,13 +4460,13 @@
       </p:sp>
       <p:sp>
         <p:nvSpPr>
-          <p:cNvPr id="8" name="Text 6"/>
-          <p:cNvSpPr/>
-          <p:nvPr/>
-        </p:nvSpPr>
-        <p:spPr>
-          <a:xfrm>
-            <a:off x="4562856" y="1883664"/>
+          <p:cNvPr id="9" name="Text 7"/>
+          <p:cNvSpPr/>
+          <p:nvPr/>
+        </p:nvSpPr>
+        <p:spPr>
+          <a:xfrm>
+            <a:off x="4562856" y="2194560"/>
             <a:ext cx="3163824" cy="182880"/>
           </a:xfrm>
           <a:prstGeom prst="rect">
@@ -4262,14 +4499,14 @@
       </p:sp>
       <p:sp>
         <p:nvSpPr>
-          <p:cNvPr id="9" name="Text 7"/>
-          <p:cNvSpPr/>
-          <p:nvPr/>
-        </p:nvSpPr>
-        <p:spPr>
-          <a:xfrm>
-            <a:off x="4562856" y="2176272"/>
-            <a:ext cx="3163824" cy="2377440"/>
+          <p:cNvPr id="10" name="Text 8"/>
+          <p:cNvSpPr/>
+          <p:nvPr/>
+        </p:nvSpPr>
+        <p:spPr>
+          <a:xfrm>
+            <a:off x="4562856" y="2487168"/>
+            <a:ext cx="3163824" cy="2194560"/>
           </a:xfrm>
           <a:prstGeom prst="rect">
             <a:avLst/>
@@ -4380,18 +4617,18 @@
       </p:sp>
       <p:sp>
         <p:nvSpPr>
-          <p:cNvPr id="10" name="Shape 8"/>
-          <p:cNvSpPr/>
-          <p:nvPr/>
-        </p:nvSpPr>
-        <p:spPr>
-          <a:xfrm>
-            <a:off x="8119872" y="1700784"/>
-            <a:ext cx="3602736" cy="3054096"/>
+          <p:cNvPr id="11" name="Shape 9"/>
+          <p:cNvSpPr/>
+          <p:nvPr/>
+        </p:nvSpPr>
+        <p:spPr>
+          <a:xfrm>
+            <a:off x="8119872" y="2011680"/>
+            <a:ext cx="3602736" cy="2834640"/>
           </a:xfrm>
           <a:prstGeom prst="roundRect">
             <a:avLst>
-              <a:gd name="adj" fmla="val 1796"/>
+              <a:gd name="adj" fmla="val 1935"/>
             </a:avLst>
           </a:prstGeom>
           <a:solidFill>
@@ -4407,13 +4644,13 @@
       </p:sp>
       <p:sp>
         <p:nvSpPr>
-          <p:cNvPr id="11" name="Text 9"/>
-          <p:cNvSpPr/>
-          <p:nvPr/>
-        </p:nvSpPr>
-        <p:spPr>
-          <a:xfrm>
-            <a:off x="8339328" y="1883664"/>
+          <p:cNvPr id="12" name="Text 10"/>
+          <p:cNvSpPr/>
+          <p:nvPr/>
+        </p:nvSpPr>
+        <p:spPr>
+          <a:xfrm>
+            <a:off x="8339328" y="2194560"/>
             <a:ext cx="3163824" cy="182880"/>
           </a:xfrm>
           <a:prstGeom prst="rect">
@@ -4446,14 +4683,14 @@
       </p:sp>
       <p:sp>
         <p:nvSpPr>
-          <p:cNvPr id="12" name="Text 10"/>
-          <p:cNvSpPr/>
-          <p:nvPr/>
-        </p:nvSpPr>
-        <p:spPr>
-          <a:xfrm>
-            <a:off x="8339328" y="2176272"/>
-            <a:ext cx="3163824" cy="2377440"/>
+          <p:cNvPr id="13" name="Text 11"/>
+          <p:cNvSpPr/>
+          <p:nvPr/>
+        </p:nvSpPr>
+        <p:spPr>
+          <a:xfrm>
+            <a:off x="8339328" y="2487168"/>
+            <a:ext cx="3163824" cy="2194560"/>
           </a:xfrm>
           <a:prstGeom prst="rect">
             <a:avLst/>
@@ -4564,7 +4801,7 @@
       </p:sp>
       <p:sp>
         <p:nvSpPr>
-          <p:cNvPr id="13" name="Text 11"/>
+          <p:cNvPr id="14" name="Text 12"/>
           <p:cNvSpPr/>
           <p:nvPr/>
         </p:nvSpPr>
@@ -5461,8 +5698,8 @@
         </p:nvSpPr>
         <p:spPr>
           <a:xfrm>
-            <a:off x="566928" y="1682496"/>
-            <a:ext cx="292608" cy="292608"/>
+            <a:off x="566928" y="1664208"/>
+            <a:ext cx="256032" cy="256032"/>
           </a:xfrm>
           <a:prstGeom prst="ellipse">
             <a:avLst/>
@@ -5486,8 +5723,8 @@
         </p:nvSpPr>
         <p:spPr>
           <a:xfrm>
-            <a:off x="566928" y="1682496"/>
-            <a:ext cx="292608" cy="292608"/>
+            <a:off x="566928" y="1664208"/>
+            <a:ext cx="256032" cy="256032"/>
           </a:xfrm>
           <a:prstGeom prst="rect">
             <a:avLst/>
@@ -5503,7 +5740,7 @@
               <a:buNone/>
             </a:pPr>
             <a:r>
-              <a:rPr lang="en-US" sz="1050" b="1" dirty="0">
+              <a:rPr lang="en-US" sz="900" b="1" dirty="0">
                 <a:solidFill>
                   <a:srgbClr val="D98D63"/>
                 </a:solidFill>
@@ -5513,7 +5750,7 @@
               </a:rPr>
               <a:t>1</a:t>
             </a:r>
-            <a:endParaRPr lang="en-US" sz="1050" dirty="0"/>
+            <a:endParaRPr lang="en-US" sz="900" dirty="0"/>
           </a:p>
         </p:txBody>
       </p:sp>
@@ -5525,8 +5762,8 @@
         </p:nvSpPr>
         <p:spPr>
           <a:xfrm>
-            <a:off x="1005840" y="1664208"/>
-            <a:ext cx="6035040" cy="256032"/>
+            <a:off x="950976" y="1627632"/>
+            <a:ext cx="6035040" cy="219456"/>
           </a:xfrm>
           <a:prstGeom prst="rect">
             <a:avLst/>
@@ -5542,7 +5779,7 @@
               <a:buNone/>
             </a:pPr>
             <a:r>
-              <a:rPr lang="en-US" sz="1250" b="1" dirty="0">
+              <a:rPr lang="en-US" sz="1150" b="1" dirty="0">
                 <a:solidFill>
                   <a:srgbClr val="FAF8F4"/>
                 </a:solidFill>
@@ -5550,9 +5787,9 @@
                 <a:ea typeface="Arial" pitchFamily="34" charset="-122"/>
                 <a:cs typeface="Arial" pitchFamily="34" charset="-120"/>
               </a:rPr>
-              <a:t>Stream the responses.</a:t>
-            </a:r>
-            <a:endParaRPr lang="en-US" sz="1250" dirty="0"/>
+              <a:t>Persist sessions to Redis.</a:t>
+            </a:r>
+            <a:endParaRPr lang="en-US" sz="1150" dirty="0"/>
           </a:p>
         </p:txBody>
       </p:sp>
@@ -5564,8 +5801,8 @@
         </p:nvSpPr>
         <p:spPr>
           <a:xfrm>
-            <a:off x="1005840" y="1938528"/>
-            <a:ext cx="6035040" cy="530352"/>
+            <a:off x="950976" y="1865376"/>
+            <a:ext cx="6035040" cy="420624"/>
           </a:xfrm>
           <a:prstGeom prst="rect">
             <a:avLst/>
@@ -5579,12 +5816,12 @@
           <a:p>
             <a:pPr indent="0" marL="0">
               <a:lnSpc>
-                <a:spcPts val="1400"/>
-              </a:lnSpc>
-              <a:buNone/>
-            </a:pPr>
-            <a:r>
-              <a:rPr lang="en-US" sz="1050" dirty="0">
+                <a:spcPts val="1200"/>
+              </a:lnSpc>
+              <a:buNone/>
+            </a:pPr>
+            <a:r>
+              <a:rPr lang="en-US" sz="950" dirty="0">
                 <a:solidFill>
                   <a:srgbClr val="A79F93"/>
                 </a:solidFill>
@@ -5592,9 +5829,9 @@
                 <a:ea typeface="Arial" pitchFamily="34" charset="-122"/>
                 <a:cs typeface="Arial" pitchFamily="34" charset="-120"/>
               </a:rPr>
-              <a:t>The biggest remaining latency win. The agent speaks, calls a tool, speaks again — today the customer waits through all of it before seeing a word.</a:t>
-            </a:r>
-            <a:endParaRPr lang="en-US" sz="1050" dirty="0"/>
+              <a:t>Sessions are a dict in memory today. Fine for a prototype, not under load.</a:t>
+            </a:r>
+            <a:endParaRPr lang="en-US" sz="950" dirty="0"/>
           </a:p>
         </p:txBody>
       </p:sp>
@@ -5606,8 +5843,8 @@
         </p:nvSpPr>
         <p:spPr>
           <a:xfrm>
-            <a:off x="566928" y="2542032"/>
-            <a:ext cx="292608" cy="292608"/>
+            <a:off x="566928" y="2322576"/>
+            <a:ext cx="256032" cy="256032"/>
           </a:xfrm>
           <a:prstGeom prst="ellipse">
             <a:avLst/>
@@ -5631,8 +5868,8 @@
         </p:nvSpPr>
         <p:spPr>
           <a:xfrm>
-            <a:off x="566928" y="2542032"/>
-            <a:ext cx="292608" cy="292608"/>
+            <a:off x="566928" y="2322576"/>
+            <a:ext cx="256032" cy="256032"/>
           </a:xfrm>
           <a:prstGeom prst="rect">
             <a:avLst/>
@@ -5648,7 +5885,7 @@
               <a:buNone/>
             </a:pPr>
             <a:r>
-              <a:rPr lang="en-US" sz="1050" b="1" dirty="0">
+              <a:rPr lang="en-US" sz="900" b="1" dirty="0">
                 <a:solidFill>
                   <a:srgbClr val="D98D63"/>
                 </a:solidFill>
@@ -5658,7 +5895,7 @@
               </a:rPr>
               <a:t>2</a:t>
             </a:r>
-            <a:endParaRPr lang="en-US" sz="1050" dirty="0"/>
+            <a:endParaRPr lang="en-US" sz="900" dirty="0"/>
           </a:p>
         </p:txBody>
       </p:sp>
@@ -5670,8 +5907,8 @@
         </p:nvSpPr>
         <p:spPr>
           <a:xfrm>
-            <a:off x="1005840" y="2523744"/>
-            <a:ext cx="6035040" cy="256032"/>
+            <a:off x="950976" y="2286000"/>
+            <a:ext cx="6035040" cy="219456"/>
           </a:xfrm>
           <a:prstGeom prst="rect">
             <a:avLst/>
@@ -5687,7 +5924,7 @@
               <a:buNone/>
             </a:pPr>
             <a:r>
-              <a:rPr lang="en-US" sz="1250" b="1" dirty="0">
+              <a:rPr lang="en-US" sz="1150" b="1" dirty="0">
                 <a:solidFill>
                   <a:srgbClr val="FAF8F4"/>
                 </a:solidFill>
@@ -5695,9 +5932,9 @@
                 <a:ea typeface="Arial" pitchFamily="34" charset="-122"/>
                 <a:cs typeface="Arial" pitchFamily="34" charset="-120"/>
               </a:rPr>
-              <a:t>Run the evals against the live model in CI.</a:t>
-            </a:r>
-            <a:endParaRPr lang="en-US" sz="1250" dirty="0"/>
+              <a:t>Stream the responses.</a:t>
+            </a:r>
+            <a:endParaRPr lang="en-US" sz="1150" dirty="0"/>
           </a:p>
         </p:txBody>
       </p:sp>
@@ -5709,8 +5946,8 @@
         </p:nvSpPr>
         <p:spPr>
           <a:xfrm>
-            <a:off x="1005840" y="2798064"/>
-            <a:ext cx="6035040" cy="530352"/>
+            <a:off x="950976" y="2523744"/>
+            <a:ext cx="6035040" cy="420624"/>
           </a:xfrm>
           <a:prstGeom prst="rect">
             <a:avLst/>
@@ -5724,12 +5961,12 @@
           <a:p>
             <a:pPr indent="0" marL="0">
               <a:lnSpc>
-                <a:spcPts val="1400"/>
-              </a:lnSpc>
-              <a:buNone/>
-            </a:pPr>
-            <a:r>
-              <a:rPr lang="en-US" sz="1050" dirty="0">
+                <a:spcPts val="1200"/>
+              </a:lnSpc>
+              <a:buNone/>
+            </a:pPr>
+            <a:r>
+              <a:rPr lang="en-US" sz="950" dirty="0">
                 <a:solidFill>
                   <a:srgbClr val="A79F93"/>
                 </a:solidFill>
@@ -5737,9 +5974,9 @@
                 <a:ea typeface="Arial" pitchFamily="34" charset="-122"/>
                 <a:cs typeface="Arial" pitchFamily="34" charset="-120"/>
               </a:rPr>
-              <a:t>Ten conversations prove the orchestration; they say nothing about how the real model behaves under it.</a:t>
-            </a:r>
-            <a:endParaRPr lang="en-US" sz="1050" dirty="0"/>
+              <a:t>The biggest remaining latency win. The agent speaks, calls a tool, speaks again — and today the customer waits through all of it before seeing a word.</a:t>
+            </a:r>
+            <a:endParaRPr lang="en-US" sz="950" dirty="0"/>
           </a:p>
         </p:txBody>
       </p:sp>
@@ -5751,8 +5988,8 @@
         </p:nvSpPr>
         <p:spPr>
           <a:xfrm>
-            <a:off x="566928" y="3401568"/>
-            <a:ext cx="292608" cy="292608"/>
+            <a:off x="566928" y="2980944"/>
+            <a:ext cx="256032" cy="256032"/>
           </a:xfrm>
           <a:prstGeom prst="ellipse">
             <a:avLst/>
@@ -5776,8 +6013,8 @@
         </p:nvSpPr>
         <p:spPr>
           <a:xfrm>
-            <a:off x="566928" y="3401568"/>
-            <a:ext cx="292608" cy="292608"/>
+            <a:off x="566928" y="2980944"/>
+            <a:ext cx="256032" cy="256032"/>
           </a:xfrm>
           <a:prstGeom prst="rect">
             <a:avLst/>
@@ -5793,7 +6030,7 @@
               <a:buNone/>
             </a:pPr>
             <a:r>
-              <a:rPr lang="en-US" sz="1050" b="1" dirty="0">
+              <a:rPr lang="en-US" sz="900" b="1" dirty="0">
                 <a:solidFill>
                   <a:srgbClr val="D98D63"/>
                 </a:solidFill>
@@ -5803,7 +6040,7 @@
               </a:rPr>
               <a:t>3</a:t>
             </a:r>
-            <a:endParaRPr lang="en-US" sz="1050" dirty="0"/>
+            <a:endParaRPr lang="en-US" sz="900" dirty="0"/>
           </a:p>
         </p:txBody>
       </p:sp>
@@ -5815,8 +6052,8 @@
         </p:nvSpPr>
         <p:spPr>
           <a:xfrm>
-            <a:off x="1005840" y="3383280"/>
-            <a:ext cx="6035040" cy="256032"/>
+            <a:off x="950976" y="2944368"/>
+            <a:ext cx="6035040" cy="219456"/>
           </a:xfrm>
           <a:prstGeom prst="rect">
             <a:avLst/>
@@ -5832,7 +6069,7 @@
               <a:buNone/>
             </a:pPr>
             <a:r>
-              <a:rPr lang="en-US" sz="1250" b="1" dirty="0">
+              <a:rPr lang="en-US" sz="1150" b="1" dirty="0">
                 <a:solidFill>
                   <a:srgbClr val="FAF8F4"/>
                 </a:solidFill>
@@ -5840,9 +6077,9 @@
                 <a:ea typeface="Arial" pitchFamily="34" charset="-122"/>
                 <a:cs typeface="Arial" pitchFamily="34" charset="-120"/>
               </a:rPr>
-              <a:t>Token exchange instead of hand-rolled minting.</a:t>
-            </a:r>
-            <a:endParaRPr lang="en-US" sz="1250" dirty="0"/>
+              <a:t>Run the evals against the live model in CI.</a:t>
+            </a:r>
+            <a:endParaRPr lang="en-US" sz="1150" dirty="0"/>
           </a:p>
         </p:txBody>
       </p:sp>
@@ -5854,8 +6091,8 @@
         </p:nvSpPr>
         <p:spPr>
           <a:xfrm>
-            <a:off x="1005840" y="3657600"/>
-            <a:ext cx="6035040" cy="530352"/>
+            <a:off x="950976" y="3182112"/>
+            <a:ext cx="6035040" cy="420624"/>
           </a:xfrm>
           <a:prstGeom prst="rect">
             <a:avLst/>
@@ -5869,12 +6106,12 @@
           <a:p>
             <a:pPr indent="0" marL="0">
               <a:lnSpc>
-                <a:spcPts val="1400"/>
-              </a:lnSpc>
-              <a:buNone/>
-            </a:pPr>
-            <a:r>
-              <a:rPr lang="en-US" sz="1050" dirty="0">
+                <a:spcPts val="1200"/>
+              </a:lnSpc>
+              <a:buNone/>
+            </a:pPr>
+            <a:r>
+              <a:rPr lang="en-US" sz="950" dirty="0">
                 <a:solidFill>
                   <a:srgbClr val="A79F93"/>
                 </a:solidFill>
@@ -5882,9 +6119,9 @@
                 <a:ea typeface="Arial" pitchFamily="34" charset="-122"/>
                 <a:cs typeface="Arial" pitchFamily="34" charset="-120"/>
               </a:rPr>
-              <a:t>Same scoped token, issued by the IdP you already run. The property that matters survives the swap.</a:t>
-            </a:r>
-            <a:endParaRPr lang="en-US" sz="1050" dirty="0"/>
+              <a:t>They run on the scripted engine, so they prove the orchestration and say nothing about how the model behaves under it.</a:t>
+            </a:r>
+            <a:endParaRPr lang="en-US" sz="950" dirty="0"/>
           </a:p>
         </p:txBody>
       </p:sp>
@@ -5896,8 +6133,8 @@
         </p:nvSpPr>
         <p:spPr>
           <a:xfrm>
-            <a:off x="566928" y="4261104"/>
-            <a:ext cx="292608" cy="292608"/>
+            <a:off x="566928" y="3639312"/>
+            <a:ext cx="256032" cy="256032"/>
           </a:xfrm>
           <a:prstGeom prst="ellipse">
             <a:avLst/>
@@ -5921,8 +6158,8 @@
         </p:nvSpPr>
         <p:spPr>
           <a:xfrm>
-            <a:off x="566928" y="4261104"/>
-            <a:ext cx="292608" cy="292608"/>
+            <a:off x="566928" y="3639312"/>
+            <a:ext cx="256032" cy="256032"/>
           </a:xfrm>
           <a:prstGeom prst="rect">
             <a:avLst/>
@@ -5938,7 +6175,7 @@
               <a:buNone/>
             </a:pPr>
             <a:r>
-              <a:rPr lang="en-US" sz="1050" b="1" dirty="0">
+              <a:rPr lang="en-US" sz="900" b="1" dirty="0">
                 <a:solidFill>
                   <a:srgbClr val="D98D63"/>
                 </a:solidFill>
@@ -5948,7 +6185,7 @@
               </a:rPr>
               <a:t>4</a:t>
             </a:r>
-            <a:endParaRPr lang="en-US" sz="1050" dirty="0"/>
+            <a:endParaRPr lang="en-US" sz="900" dirty="0"/>
           </a:p>
         </p:txBody>
       </p:sp>
@@ -5960,8 +6197,8 @@
         </p:nvSpPr>
         <p:spPr>
           <a:xfrm>
-            <a:off x="1005840" y="4242816"/>
-            <a:ext cx="6035040" cy="256032"/>
+            <a:off x="950976" y="3602736"/>
+            <a:ext cx="6035040" cy="219456"/>
           </a:xfrm>
           <a:prstGeom prst="rect">
             <a:avLst/>
@@ -5977,7 +6214,7 @@
               <a:buNone/>
             </a:pPr>
             <a:r>
-              <a:rPr lang="en-US" sz="1250" b="1" dirty="0">
+              <a:rPr lang="en-US" sz="1150" b="1" dirty="0">
                 <a:solidFill>
                   <a:srgbClr val="FAF8F4"/>
                 </a:solidFill>
@@ -5985,9 +6222,9 @@
                 <a:ea typeface="Arial" pitchFamily="34" charset="-122"/>
                 <a:cs typeface="Arial" pitchFamily="34" charset="-120"/>
               </a:rPr>
-              <a:t>Policy as a service the CX team owns.</a:t>
-            </a:r>
-            <a:endParaRPr lang="en-US" sz="1250" dirty="0"/>
+              <a:t>Grow the eval set from production traffic.</a:t>
+            </a:r>
+            <a:endParaRPr lang="en-US" sz="1150" dirty="0"/>
           </a:p>
         </p:txBody>
       </p:sp>
@@ -5999,8 +6236,8 @@
         </p:nvSpPr>
         <p:spPr>
           <a:xfrm>
-            <a:off x="1005840" y="4517136"/>
-            <a:ext cx="6035040" cy="530352"/>
+            <a:off x="950976" y="3840480"/>
+            <a:ext cx="6035040" cy="420624"/>
           </a:xfrm>
           <a:prstGeom prst="rect">
             <a:avLst/>
@@ -6014,12 +6251,12 @@
           <a:p>
             <a:pPr indent="0" marL="0">
               <a:lnSpc>
-                <a:spcPts val="1400"/>
-              </a:lnSpc>
-              <a:buNone/>
-            </a:pPr>
-            <a:r>
-              <a:rPr lang="en-US" sz="1050" dirty="0">
+                <a:spcPts val="1200"/>
+              </a:lnSpc>
+              <a:buNone/>
+            </a:pPr>
+            <a:r>
+              <a:rPr lang="en-US" sz="950" dirty="0">
                 <a:solidFill>
                   <a:srgbClr val="A79F93"/>
                 </a:solidFill>
@@ -6027,9 +6264,9 @@
                 <a:ea typeface="Arial" pitchFamily="34" charset="-122"/>
                 <a:cs typeface="Arial" pitchFamily="34" charset="-120"/>
               </a:rPr>
-              <a:t>Return windows should not require a deploy.</a:t>
-            </a:r>
-            <a:endParaRPr lang="en-US" sz="1050" dirty="0"/>
+              <a:t>My test set is made up. At go-live I would collect real requests and evaluate against those.</a:t>
+            </a:r>
+            <a:endParaRPr lang="en-US" sz="950" dirty="0"/>
           </a:p>
         </p:txBody>
       </p:sp>
@@ -6041,12 +6278,157 @@
         </p:nvSpPr>
         <p:spPr>
           <a:xfrm>
-            <a:off x="7315200" y="1664208"/>
-            <a:ext cx="4297680" cy="3035808"/>
+            <a:off x="566928" y="4297680"/>
+            <a:ext cx="256032" cy="256032"/>
+          </a:xfrm>
+          <a:prstGeom prst="ellipse">
+            <a:avLst/>
+          </a:prstGeom>
+          <a:solidFill>
+            <a:srgbClr val="3A2A20"/>
+          </a:solidFill>
+          <a:ln w="9525">
+            <a:solidFill>
+              <a:srgbClr val="D98D63"/>
+            </a:solidFill>
+            <a:prstDash val="solid"/>
+          </a:ln>
+        </p:spPr>
+      </p:sp>
+      <p:sp>
+        <p:nvSpPr>
+          <p:cNvPr id="21" name="Text 19"/>
+          <p:cNvSpPr/>
+          <p:nvPr/>
+        </p:nvSpPr>
+        <p:spPr>
+          <a:xfrm>
+            <a:off x="566928" y="4297680"/>
+            <a:ext cx="256032" cy="256032"/>
+          </a:xfrm>
+          <a:prstGeom prst="rect">
+            <a:avLst/>
+          </a:prstGeom>
+          <a:noFill/>
+          <a:ln/>
+        </p:spPr>
+        <p:txBody>
+          <a:bodyPr wrap="square" lIns="0" tIns="0" rIns="0" bIns="0" rtlCol="0" anchor="ctr"/>
+          <a:lstStyle/>
+          <a:p>
+            <a:pPr algn="ctr" indent="0" marL="0">
+              <a:buNone/>
+            </a:pPr>
+            <a:r>
+              <a:rPr lang="en-US" sz="900" b="1" dirty="0">
+                <a:solidFill>
+                  <a:srgbClr val="D98D63"/>
+                </a:solidFill>
+                <a:latin typeface="Arial" pitchFamily="34" charset="0"/>
+                <a:ea typeface="Arial" pitchFamily="34" charset="-122"/>
+                <a:cs typeface="Arial" pitchFamily="34" charset="-120"/>
+              </a:rPr>
+              <a:t>5</a:t>
+            </a:r>
+            <a:endParaRPr lang="en-US" sz="900" dirty="0"/>
+          </a:p>
+        </p:txBody>
+      </p:sp>
+      <p:sp>
+        <p:nvSpPr>
+          <p:cNvPr id="22" name="Text 20"/>
+          <p:cNvSpPr/>
+          <p:nvPr/>
+        </p:nvSpPr>
+        <p:spPr>
+          <a:xfrm>
+            <a:off x="950976" y="4261104"/>
+            <a:ext cx="6035040" cy="219456"/>
+          </a:xfrm>
+          <a:prstGeom prst="rect">
+            <a:avLst/>
+          </a:prstGeom>
+          <a:noFill/>
+          <a:ln/>
+        </p:spPr>
+        <p:txBody>
+          <a:bodyPr wrap="square" lIns="0" tIns="0" rIns="0" bIns="0" rtlCol="0" anchor="ctr"/>
+          <a:lstStyle/>
+          <a:p>
+            <a:pPr indent="0" marL="0">
+              <a:buNone/>
+            </a:pPr>
+            <a:r>
+              <a:rPr lang="en-US" sz="1150" b="1" dirty="0">
+                <a:solidFill>
+                  <a:srgbClr val="FAF8F4"/>
+                </a:solidFill>
+                <a:latin typeface="Arial" pitchFamily="34" charset="0"/>
+                <a:ea typeface="Arial" pitchFamily="34" charset="-122"/>
+                <a:cs typeface="Arial" pitchFamily="34" charset="-120"/>
+              </a:rPr>
+              <a:t>Give the policy engine to the CX team.</a:t>
+            </a:r>
+            <a:endParaRPr lang="en-US" sz="1150" dirty="0"/>
+          </a:p>
+        </p:txBody>
+      </p:sp>
+      <p:sp>
+        <p:nvSpPr>
+          <p:cNvPr id="23" name="Text 21"/>
+          <p:cNvSpPr/>
+          <p:nvPr/>
+        </p:nvSpPr>
+        <p:spPr>
+          <a:xfrm>
+            <a:off x="950976" y="4498848"/>
+            <a:ext cx="6035040" cy="420624"/>
+          </a:xfrm>
+          <a:prstGeom prst="rect">
+            <a:avLst/>
+          </a:prstGeom>
+          <a:noFill/>
+          <a:ln/>
+        </p:spPr>
+        <p:txBody>
+          <a:bodyPr wrap="square" lIns="0" tIns="0" rIns="0" bIns="0" rtlCol="0" anchor="t"/>
+          <a:lstStyle/>
+          <a:p>
+            <a:pPr indent="0" marL="0">
+              <a:lnSpc>
+                <a:spcPts val="1200"/>
+              </a:lnSpc>
+              <a:buNone/>
+            </a:pPr>
+            <a:r>
+              <a:rPr lang="en-US" sz="950" dirty="0">
+                <a:solidFill>
+                  <a:srgbClr val="A79F93"/>
+                </a:solidFill>
+                <a:latin typeface="Arial" pitchFamily="34" charset="0"/>
+                <a:ea typeface="Arial" pitchFamily="34" charset="-122"/>
+                <a:cs typeface="Arial" pitchFamily="34" charset="-120"/>
+              </a:rPr>
+              <a:t>Changing a return window from 30 to 60 days should not need a deploy.</a:t>
+            </a:r>
+            <a:endParaRPr lang="en-US" sz="950" dirty="0"/>
+          </a:p>
+        </p:txBody>
+      </p:sp>
+      <p:sp>
+        <p:nvSpPr>
+          <p:cNvPr id="24" name="Shape 22"/>
+          <p:cNvSpPr/>
+          <p:nvPr/>
+        </p:nvSpPr>
+        <p:spPr>
+          <a:xfrm>
+            <a:off x="7315200" y="1645920"/>
+            <a:ext cx="4297680" cy="3108960"/>
           </a:xfrm>
           <a:prstGeom prst="roundRect">
             <a:avLst>
-              <a:gd name="adj" fmla="val 1807"/>
+              <a:gd name="adj" fmla="val 1765"/>
             </a:avLst>
           </a:prstGeom>
           <a:solidFill>
@@ -6062,7 +6444,7 @@
       </p:sp>
       <p:sp>
         <p:nvSpPr>
-          <p:cNvPr id="21" name="Text 19"/>
+          <p:cNvPr id="25" name="Text 23"/>
           <p:cNvSpPr/>
           <p:nvPr/>
         </p:nvSpPr>
@@ -6101,7 +6483,7 @@
       </p:sp>
       <p:sp>
         <p:nvSpPr>
-          <p:cNvPr id="22" name="Text 20"/>
+          <p:cNvPr id="26" name="Text 24"/>
           <p:cNvSpPr/>
           <p:nvPr/>
         </p:nvSpPr>
@@ -6140,7 +6522,7 @@
       </p:sp>
       <p:sp>
         <p:nvSpPr>
-          <p:cNvPr id="23" name="Text 21"/>
+          <p:cNvPr id="27" name="Text 25"/>
           <p:cNvSpPr/>
           <p:nvPr/>
         </p:nvSpPr>
@@ -6182,7 +6564,7 @@
       </p:sp>
       <p:sp>
         <p:nvSpPr>
-          <p:cNvPr id="24" name="Text 22"/>
+          <p:cNvPr id="28" name="Text 26"/>
           <p:cNvSpPr/>
           <p:nvPr/>
         </p:nvSpPr>
@@ -6224,7 +6606,7 @@
       </p:sp>
       <p:sp>
         <p:nvSpPr>
-          <p:cNvPr id="25" name="Text 23"/>
+          <p:cNvPr id="29" name="Text 27"/>
           <p:cNvSpPr/>
           <p:nvPr/>
         </p:nvSpPr>
